--- a/Sem-1/RDBMS Theory/Unit-5/Unit-5.pptx
+++ b/Sem-1/RDBMS Theory/Unit-5/Unit-5.pptx
@@ -716,7 +716,7 @@
           <a:p>
             <a:fld id="{4A2E5D5B-4CE0-4E6F-84BE-A53E645E58F0}" type="datetimeFigureOut">
               <a:rPr lang="en-IN" smtClean="0"/>
-              <a:t>13-12-2025</a:t>
+              <a:t>17-12-2025</a:t>
             </a:fld>
             <a:endParaRPr lang="en-IN" dirty="0"/>
           </a:p>
@@ -1730,7 +1730,7 @@
             <a:fld id="{B61BEF0D-F0BB-DE4B-95CE-6DB70DBA9567}" type="datetimeFigureOut">
               <a:rPr lang="en-US" dirty="0"/>
               <a:pPr/>
-              <a:t>12/13/2025</a:t>
+              <a:t>12/17/2025</a:t>
             </a:fld>
             <a:endParaRPr lang="en-US" dirty="0"/>
           </a:p>
@@ -1978,7 +1978,7 @@
             <a:fld id="{B61BEF0D-F0BB-DE4B-95CE-6DB70DBA9567}" type="datetimeFigureOut">
               <a:rPr lang="en-US" dirty="0"/>
               <a:pPr/>
-              <a:t>12/13/2025</a:t>
+              <a:t>12/17/2025</a:t>
             </a:fld>
             <a:endParaRPr lang="en-US" dirty="0"/>
           </a:p>
@@ -2289,7 +2289,7 @@
             <a:fld id="{B61BEF0D-F0BB-DE4B-95CE-6DB70DBA9567}" type="datetimeFigureOut">
               <a:rPr lang="en-US" dirty="0"/>
               <a:pPr/>
-              <a:t>12/13/2025</a:t>
+              <a:t>12/17/2025</a:t>
             </a:fld>
             <a:endParaRPr lang="en-US" dirty="0"/>
           </a:p>
@@ -2619,7 +2619,7 @@
             <a:fld id="{B61BEF0D-F0BB-DE4B-95CE-6DB70DBA9567}" type="datetimeFigureOut">
               <a:rPr lang="en-US" dirty="0"/>
               <a:pPr/>
-              <a:t>12/13/2025</a:t>
+              <a:t>12/17/2025</a:t>
             </a:fld>
             <a:endParaRPr lang="en-US" dirty="0"/>
           </a:p>
@@ -2930,7 +2930,7 @@
             <a:fld id="{B61BEF0D-F0BB-DE4B-95CE-6DB70DBA9567}" type="datetimeFigureOut">
               <a:rPr lang="en-US" dirty="0"/>
               <a:pPr/>
-              <a:t>12/13/2025</a:t>
+              <a:t>12/17/2025</a:t>
             </a:fld>
             <a:endParaRPr lang="en-US" dirty="0"/>
           </a:p>
@@ -3320,7 +3320,7 @@
             <a:fld id="{B61BEF0D-F0BB-DE4B-95CE-6DB70DBA9567}" type="datetimeFigureOut">
               <a:rPr lang="en-US" dirty="0"/>
               <a:pPr/>
-              <a:t>12/13/2025</a:t>
+              <a:t>12/17/2025</a:t>
             </a:fld>
             <a:endParaRPr lang="en-US" dirty="0"/>
           </a:p>
@@ -3486,7 +3486,7 @@
           <a:p>
             <a:fld id="{55C6B4A9-1611-4792-9094-5F34BCA07E0B}" type="datetimeFigureOut">
               <a:rPr lang="en-US" dirty="0"/>
-              <a:t>12/13/2025</a:t>
+              <a:t>12/17/2025</a:t>
             </a:fld>
             <a:endParaRPr lang="en-US" dirty="0"/>
           </a:p>
@@ -3662,7 +3662,7 @@
             <a:fld id="{B61BEF0D-F0BB-DE4B-95CE-6DB70DBA9567}" type="datetimeFigureOut">
               <a:rPr lang="en-US" dirty="0"/>
               <a:pPr/>
-              <a:t>12/13/2025</a:t>
+              <a:t>12/17/2025</a:t>
             </a:fld>
             <a:endParaRPr lang="en-US" dirty="0"/>
           </a:p>
@@ -3828,7 +3828,7 @@
           <a:p>
             <a:fld id="{42A54C80-263E-416B-A8E0-580EDEADCBDC}" type="datetimeFigureOut">
               <a:rPr lang="en-US" dirty="0"/>
-              <a:t>12/13/2025</a:t>
+              <a:t>12/17/2025</a:t>
             </a:fld>
             <a:endParaRPr lang="en-US" dirty="0"/>
           </a:p>
@@ -4071,7 +4071,7 @@
             <a:fld id="{B61BEF0D-F0BB-DE4B-95CE-6DB70DBA9567}" type="datetimeFigureOut">
               <a:rPr lang="en-US" dirty="0"/>
               <a:pPr/>
-              <a:t>12/13/2025</a:t>
+              <a:t>12/17/2025</a:t>
             </a:fld>
             <a:endParaRPr lang="en-US" dirty="0"/>
           </a:p>
@@ -4299,7 +4299,7 @@
           <a:p>
             <a:fld id="{42A54C80-263E-416B-A8E0-580EDEADCBDC}" type="datetimeFigureOut">
               <a:rPr lang="en-US" dirty="0"/>
-              <a:t>12/13/2025</a:t>
+              <a:t>12/17/2025</a:t>
             </a:fld>
             <a:endParaRPr lang="en-US" dirty="0"/>
           </a:p>
@@ -4669,7 +4669,7 @@
             <a:fld id="{B61BEF0D-F0BB-DE4B-95CE-6DB70DBA9567}" type="datetimeFigureOut">
               <a:rPr lang="en-US" dirty="0"/>
               <a:pPr/>
-              <a:t>12/13/2025</a:t>
+              <a:t>12/17/2025</a:t>
             </a:fld>
             <a:endParaRPr lang="en-US" dirty="0"/>
           </a:p>
@@ -4789,7 +4789,7 @@
             <a:fld id="{B61BEF0D-F0BB-DE4B-95CE-6DB70DBA9567}" type="datetimeFigureOut">
               <a:rPr lang="en-US" dirty="0"/>
               <a:pPr/>
-              <a:t>12/13/2025</a:t>
+              <a:t>12/17/2025</a:t>
             </a:fld>
             <a:endParaRPr lang="en-US" dirty="0"/>
           </a:p>
@@ -4881,7 +4881,7 @@
             <a:fld id="{B61BEF0D-F0BB-DE4B-95CE-6DB70DBA9567}" type="datetimeFigureOut">
               <a:rPr lang="en-US" dirty="0"/>
               <a:pPr/>
-              <a:t>12/13/2025</a:t>
+              <a:t>12/17/2025</a:t>
             </a:fld>
             <a:endParaRPr lang="en-US" dirty="0"/>
           </a:p>
@@ -5132,7 +5132,7 @@
           <a:p>
             <a:fld id="{42A54C80-263E-416B-A8E0-580EDEADCBDC}" type="datetimeFigureOut">
               <a:rPr lang="en-US" dirty="0"/>
-              <a:t>12/13/2025</a:t>
+              <a:t>12/17/2025</a:t>
             </a:fld>
             <a:endParaRPr lang="en-US" dirty="0"/>
           </a:p>
@@ -5433,7 +5433,7 @@
             <a:fld id="{B61BEF0D-F0BB-DE4B-95CE-6DB70DBA9567}" type="datetimeFigureOut">
               <a:rPr lang="en-US" dirty="0"/>
               <a:pPr/>
-              <a:t>12/13/2025</a:t>
+              <a:t>12/17/2025</a:t>
             </a:fld>
             <a:endParaRPr lang="en-US" dirty="0"/>
           </a:p>
@@ -6131,7 +6131,7 @@
             <a:fld id="{B61BEF0D-F0BB-DE4B-95CE-6DB70DBA9567}" type="datetimeFigureOut">
               <a:rPr lang="en-US" dirty="0"/>
               <a:pPr/>
-              <a:t>12/13/2025</a:t>
+              <a:t>12/17/2025</a:t>
             </a:fld>
             <a:endParaRPr lang="en-US" dirty="0"/>
           </a:p>
@@ -7159,7 +7159,7 @@
           <a:p>
             <a:r>
               <a:rPr lang="en-US" sz="1200" i="1" dirty="0"/>
-              <a:t>09/11/2025</a:t>
+              <a:t>12/12/2025</a:t>
             </a:r>
             <a:endParaRPr lang="en-IN" sz="1200" i="1" dirty="0"/>
           </a:p>
